--- a/environment/seed/sources/Shared/Operations/Project Reviews/weekly top jobs review - 6.29 PM copy.pptx
+++ b/environment/seed/sources/Shared/Operations/Project Reviews/weekly top jobs review - 6.29 PM copy.pptx
@@ -2,19 +2,19 @@
 <file path=ppt/presentation.xml><?xml version="1.0" encoding="utf-8"?>
 <p:presentation xmlns:p="http://schemas.openxmlformats.org/presentationml/2006/main">
   <p:sldMasterIdLst>
-    <p:sldMasterId xmlns:r="http://schemas.openxmlformats.org/officeDocument/2006/relationships" id="2147483648" r:id="R71e26899b7764812"/>
+    <p:sldMasterId xmlns:r="http://schemas.openxmlformats.org/officeDocument/2006/relationships" id="2147483648" r:id="Ra054d2390f53485a"/>
   </p:sldMasterIdLst>
   <p:notesMasterIdLst>
-    <p:notesMasterId xmlns:r="http://schemas.openxmlformats.org/officeDocument/2006/relationships" r:id="Rc6f9db9733744110"/>
+    <p:notesMasterId xmlns:r="http://schemas.openxmlformats.org/officeDocument/2006/relationships" r:id="R5a015f9ad4df4e6f"/>
   </p:notesMasterIdLst>
   <p:sldIdLst>
-    <p:sldId xmlns:r="http://schemas.openxmlformats.org/officeDocument/2006/relationships" id="256" r:id="R239d21d5f7454d61"/>
-    <p:sldId xmlns:r="http://schemas.openxmlformats.org/officeDocument/2006/relationships" id="257" r:id="Rece05d28d0454e62"/>
-    <p:sldId xmlns:r="http://schemas.openxmlformats.org/officeDocument/2006/relationships" id="258" r:id="R7187917247b946d8"/>
-    <p:sldId xmlns:r="http://schemas.openxmlformats.org/officeDocument/2006/relationships" id="259" r:id="R09f9c48760404510"/>
-    <p:sldId xmlns:r="http://schemas.openxmlformats.org/officeDocument/2006/relationships" id="260" r:id="R5858e59d03464f70"/>
-    <p:sldId xmlns:r="http://schemas.openxmlformats.org/officeDocument/2006/relationships" id="261" r:id="R064e64d01e7544e2"/>
-    <p:sldId xmlns:r="http://schemas.openxmlformats.org/officeDocument/2006/relationships" id="262" r:id="Rdfae8e32f0764dc9"/>
+    <p:sldId xmlns:r="http://schemas.openxmlformats.org/officeDocument/2006/relationships" id="256" r:id="R8c8fdaffece94991"/>
+    <p:sldId xmlns:r="http://schemas.openxmlformats.org/officeDocument/2006/relationships" id="257" r:id="R2ca0662b714a4ce6"/>
+    <p:sldId xmlns:r="http://schemas.openxmlformats.org/officeDocument/2006/relationships" id="258" r:id="R126656e238074079"/>
+    <p:sldId xmlns:r="http://schemas.openxmlformats.org/officeDocument/2006/relationships" id="259" r:id="R45b4d9e2cc62462d"/>
+    <p:sldId xmlns:r="http://schemas.openxmlformats.org/officeDocument/2006/relationships" id="260" r:id="R7a2fb62ffc1a4ed3"/>
+    <p:sldId xmlns:r="http://schemas.openxmlformats.org/officeDocument/2006/relationships" id="261" r:id="Ra512f9afdfd5412a"/>
+    <p:sldId xmlns:r="http://schemas.openxmlformats.org/officeDocument/2006/relationships" id="262" r:id="Ra12422ab65614ea0"/>
   </p:sldIdLst>
   <p:sldSz cx="12192000" cy="6858000"/>
   <p:notesSz cx="6858000" cy="9144000"/>
@@ -1006,7 +1006,7 @@
   </p:cSld>
   <p:clrMap bg1="lt1" tx1="dk1" bg2="lt2" tx2="dk2" accent1="accent1" accent2="accent2" accent3="accent3" accent4="accent4" accent5="accent5" accent6="accent6" hlink="hlink" folHlink="folHlink"/>
   <p:sldLayoutIdLst>
-    <p:sldLayoutId xmlns:r="http://schemas.openxmlformats.org/officeDocument/2006/relationships" id="2147483649" r:id="R489195bbceb8414c"/>
+    <p:sldLayoutId xmlns:r="http://schemas.openxmlformats.org/officeDocument/2006/relationships" id="2147483649" r:id="Rc27301d73446447b"/>
   </p:sldLayoutIdLst>
   <p:txStyles>
     <p:titleStyle>
@@ -1585,6 +1585,7 @@
           <a:lstStyle xmlns:a="http://schemas.openxmlformats.org/drawingml/2006/main"/>
           <a:p xmlns:a="http://schemas.openxmlformats.org/drawingml/2006/main">
             <a:pPr algn="l">
+              <a:buNone/>
               <a:defRPr sz="1050" b="1">
                 <a:solidFill>
                   <a:srgbClr val="173B33"/>
@@ -1635,6 +1636,7 @@
           <a:lstStyle xmlns:a="http://schemas.openxmlformats.org/drawingml/2006/main"/>
           <a:p xmlns:a="http://schemas.openxmlformats.org/drawingml/2006/main">
             <a:pPr algn="r">
+              <a:buNone/>
               <a:defRPr sz="975" b="1">
                 <a:solidFill>
                   <a:srgbClr val="666761"/>
@@ -1718,6 +1720,7 @@
           <a:lstStyle xmlns:a="http://schemas.openxmlformats.org/drawingml/2006/main"/>
           <a:p xmlns:a="http://schemas.openxmlformats.org/drawingml/2006/main">
             <a:pPr algn="l">
+              <a:buNone/>
               <a:defRPr sz="4050" b="1">
                 <a:solidFill>
                   <a:srgbClr val="173B33"/>
@@ -1768,6 +1771,7 @@
           <a:lstStyle xmlns:a="http://schemas.openxmlformats.org/drawingml/2006/main"/>
           <a:p xmlns:a="http://schemas.openxmlformats.org/drawingml/2006/main">
             <a:pPr algn="l">
+              <a:buNone/>
               <a:defRPr sz="1800" b="0">
                 <a:solidFill>
                   <a:srgbClr val="252725"/>
@@ -1851,6 +1855,7 @@
           <a:lstStyle xmlns:a="http://schemas.openxmlformats.org/drawingml/2006/main"/>
           <a:p xmlns:a="http://schemas.openxmlformats.org/drawingml/2006/main">
             <a:pPr algn="l">
+              <a:buNone/>
               <a:defRPr sz="1350" b="0">
                 <a:solidFill>
                   <a:srgbClr val="666761"/>
@@ -1930,6 +1935,7 @@
           <a:lstStyle xmlns:a="http://schemas.openxmlformats.org/drawingml/2006/main"/>
           <a:p xmlns:a="http://schemas.openxmlformats.org/drawingml/2006/main">
             <a:pPr algn="l">
+              <a:buNone/>
               <a:defRPr sz="900" b="1">
                 <a:solidFill>
                   <a:srgbClr val="173B33"/>
@@ -1980,6 +1986,7 @@
           <a:lstStyle xmlns:a="http://schemas.openxmlformats.org/drawingml/2006/main"/>
           <a:p xmlns:a="http://schemas.openxmlformats.org/drawingml/2006/main">
             <a:pPr algn="r">
+              <a:buNone/>
               <a:defRPr sz="900" b="1">
                 <a:solidFill>
                   <a:srgbClr val="666761"/>
@@ -2096,6 +2103,7 @@
           <a:lstStyle xmlns:a="http://schemas.openxmlformats.org/drawingml/2006/main"/>
           <a:p xmlns:a="http://schemas.openxmlformats.org/drawingml/2006/main">
             <a:pPr algn="l">
+              <a:buNone/>
               <a:defRPr sz="825" b="0">
                 <a:solidFill>
                   <a:srgbClr val="666761"/>
@@ -2146,6 +2154,7 @@
           <a:lstStyle xmlns:a="http://schemas.openxmlformats.org/drawingml/2006/main"/>
           <a:p xmlns:a="http://schemas.openxmlformats.org/drawingml/2006/main">
             <a:pPr algn="r">
+              <a:buNone/>
               <a:defRPr sz="825" b="0">
                 <a:solidFill>
                   <a:srgbClr val="666761"/>
@@ -2196,6 +2205,7 @@
           <a:lstStyle xmlns:a="http://schemas.openxmlformats.org/drawingml/2006/main"/>
           <a:p xmlns:a="http://schemas.openxmlformats.org/drawingml/2006/main">
             <a:pPr algn="l">
+              <a:buNone/>
               <a:defRPr sz="2850" b="1">
                 <a:solidFill>
                   <a:srgbClr val="173B33"/>
@@ -2246,6 +2256,7 @@
           <a:lstStyle xmlns:a="http://schemas.openxmlformats.org/drawingml/2006/main"/>
           <a:p xmlns:a="http://schemas.openxmlformats.org/drawingml/2006/main">
             <a:pPr algn="l">
+              <a:buNone/>
               <a:defRPr sz="975" b="1">
                 <a:solidFill>
                   <a:srgbClr val="666761"/>
@@ -2296,6 +2307,7 @@
           <a:lstStyle xmlns:a="http://schemas.openxmlformats.org/drawingml/2006/main"/>
           <a:p xmlns:a="http://schemas.openxmlformats.org/drawingml/2006/main">
             <a:pPr algn="l">
+              <a:buNone/>
               <a:defRPr sz="1575" b="0">
                 <a:solidFill>
                   <a:srgbClr val="252725"/>
@@ -2379,6 +2391,7 @@
           <a:lstStyle xmlns:a="http://schemas.openxmlformats.org/drawingml/2006/main"/>
           <a:p xmlns:a="http://schemas.openxmlformats.org/drawingml/2006/main">
             <a:pPr algn="l">
+              <a:buNone/>
               <a:defRPr sz="975" b="1">
                 <a:solidFill>
                   <a:srgbClr val="666761"/>
@@ -2429,6 +2442,7 @@
           <a:lstStyle xmlns:a="http://schemas.openxmlformats.org/drawingml/2006/main"/>
           <a:p xmlns:a="http://schemas.openxmlformats.org/drawingml/2006/main">
             <a:pPr algn="l">
+              <a:buNone/>
               <a:defRPr sz="1575" b="0">
                 <a:solidFill>
                   <a:srgbClr val="252725"/>
@@ -2512,6 +2526,7 @@
           <a:lstStyle xmlns:a="http://schemas.openxmlformats.org/drawingml/2006/main"/>
           <a:p xmlns:a="http://schemas.openxmlformats.org/drawingml/2006/main">
             <a:pPr algn="l">
+              <a:buNone/>
               <a:defRPr sz="975" b="1">
                 <a:solidFill>
                   <a:srgbClr val="666761"/>
@@ -2562,6 +2577,7 @@
           <a:lstStyle xmlns:a="http://schemas.openxmlformats.org/drawingml/2006/main"/>
           <a:p xmlns:a="http://schemas.openxmlformats.org/drawingml/2006/main">
             <a:pPr algn="l">
+              <a:buNone/>
               <a:defRPr sz="1575" b="0">
                 <a:solidFill>
                   <a:srgbClr val="252725"/>
@@ -2645,6 +2661,7 @@
           <a:lstStyle xmlns:a="http://schemas.openxmlformats.org/drawingml/2006/main"/>
           <a:p xmlns:a="http://schemas.openxmlformats.org/drawingml/2006/main">
             <a:pPr algn="l">
+              <a:buNone/>
               <a:defRPr sz="975" b="1">
                 <a:solidFill>
                   <a:srgbClr val="666761"/>
@@ -2695,6 +2712,7 @@
           <a:lstStyle xmlns:a="http://schemas.openxmlformats.org/drawingml/2006/main"/>
           <a:p xmlns:a="http://schemas.openxmlformats.org/drawingml/2006/main">
             <a:pPr algn="l">
+              <a:buNone/>
               <a:defRPr sz="1575" b="0">
                 <a:solidFill>
                   <a:srgbClr val="252725"/>
@@ -2745,6 +2763,7 @@
           <a:lstStyle xmlns:a="http://schemas.openxmlformats.org/drawingml/2006/main"/>
           <a:p xmlns:a="http://schemas.openxmlformats.org/drawingml/2006/main">
             <a:pPr algn="l">
+              <a:buNone/>
               <a:defRPr sz="900" b="1">
                 <a:solidFill>
                   <a:srgbClr val="666761"/>
@@ -2795,6 +2814,7 @@
           <a:lstStyle xmlns:a="http://schemas.openxmlformats.org/drawingml/2006/main"/>
           <a:p xmlns:a="http://schemas.openxmlformats.org/drawingml/2006/main">
             <a:pPr algn="l">
+              <a:buNone/>
               <a:defRPr sz="4800" b="1">
                 <a:solidFill>
                   <a:srgbClr val="173B33"/>
@@ -2878,6 +2898,7 @@
           <a:lstStyle xmlns:a="http://schemas.openxmlformats.org/drawingml/2006/main"/>
           <a:p xmlns:a="http://schemas.openxmlformats.org/drawingml/2006/main">
             <a:pPr algn="l">
+              <a:buNone/>
               <a:defRPr sz="1275" b="0">
                 <a:solidFill>
                   <a:srgbClr val="252725"/>
@@ -2957,6 +2978,7 @@
           <a:lstStyle xmlns:a="http://schemas.openxmlformats.org/drawingml/2006/main"/>
           <a:p xmlns:a="http://schemas.openxmlformats.org/drawingml/2006/main">
             <a:pPr algn="l">
+              <a:buNone/>
               <a:defRPr sz="900" b="1">
                 <a:solidFill>
                   <a:srgbClr val="173B33"/>
@@ -3007,6 +3029,7 @@
           <a:lstStyle xmlns:a="http://schemas.openxmlformats.org/drawingml/2006/main"/>
           <a:p xmlns:a="http://schemas.openxmlformats.org/drawingml/2006/main">
             <a:pPr algn="r">
+              <a:buNone/>
               <a:defRPr sz="900" b="1">
                 <a:solidFill>
                   <a:srgbClr val="666761"/>
@@ -3123,6 +3146,7 @@
           <a:lstStyle xmlns:a="http://schemas.openxmlformats.org/drawingml/2006/main"/>
           <a:p xmlns:a="http://schemas.openxmlformats.org/drawingml/2006/main">
             <a:pPr algn="l">
+              <a:buNone/>
               <a:defRPr sz="825" b="0">
                 <a:solidFill>
                   <a:srgbClr val="666761"/>
@@ -3173,6 +3197,7 @@
           <a:lstStyle xmlns:a="http://schemas.openxmlformats.org/drawingml/2006/main"/>
           <a:p xmlns:a="http://schemas.openxmlformats.org/drawingml/2006/main">
             <a:pPr algn="r">
+              <a:buNone/>
               <a:defRPr sz="825" b="0">
                 <a:solidFill>
                   <a:srgbClr val="666761"/>
@@ -3223,6 +3248,7 @@
           <a:lstStyle xmlns:a="http://schemas.openxmlformats.org/drawingml/2006/main"/>
           <a:p xmlns:a="http://schemas.openxmlformats.org/drawingml/2006/main">
             <a:pPr algn="l">
+              <a:buNone/>
               <a:defRPr sz="2850" b="1">
                 <a:solidFill>
                   <a:srgbClr val="173B33"/>
@@ -3273,6 +3299,7 @@
           <a:lstStyle xmlns:a="http://schemas.openxmlformats.org/drawingml/2006/main"/>
           <a:p xmlns:a="http://schemas.openxmlformats.org/drawingml/2006/main">
             <a:pPr algn="l">
+              <a:buNone/>
               <a:defRPr sz="900" b="1">
                 <a:solidFill>
                   <a:srgbClr val="666761"/>
@@ -3323,6 +3350,7 @@
           <a:lstStyle xmlns:a="http://schemas.openxmlformats.org/drawingml/2006/main"/>
           <a:p xmlns:a="http://schemas.openxmlformats.org/drawingml/2006/main">
             <a:pPr algn="l">
+              <a:buNone/>
               <a:defRPr sz="4350" b="1">
                 <a:solidFill>
                   <a:srgbClr val="173B33"/>
@@ -3406,6 +3434,7 @@
           <a:lstStyle xmlns:a="http://schemas.openxmlformats.org/drawingml/2006/main"/>
           <a:p xmlns:a="http://schemas.openxmlformats.org/drawingml/2006/main">
             <a:pPr algn="l">
+              <a:buNone/>
               <a:defRPr sz="1275" b="0">
                 <a:solidFill>
                   <a:srgbClr val="252725"/>
@@ -3456,6 +3485,7 @@
           <a:lstStyle xmlns:a="http://schemas.openxmlformats.org/drawingml/2006/main"/>
           <a:p xmlns:a="http://schemas.openxmlformats.org/drawingml/2006/main">
             <a:pPr algn="l">
+              <a:buNone/>
               <a:defRPr sz="975" b="1">
                 <a:solidFill>
                   <a:srgbClr val="666761"/>
@@ -3506,6 +3536,7 @@
           <a:lstStyle xmlns:a="http://schemas.openxmlformats.org/drawingml/2006/main"/>
           <a:p xmlns:a="http://schemas.openxmlformats.org/drawingml/2006/main">
             <a:pPr algn="l">
+              <a:buNone/>
               <a:defRPr sz="1575" b="0">
                 <a:solidFill>
                   <a:srgbClr val="252725"/>
@@ -3589,6 +3620,7 @@
           <a:lstStyle xmlns:a="http://schemas.openxmlformats.org/drawingml/2006/main"/>
           <a:p xmlns:a="http://schemas.openxmlformats.org/drawingml/2006/main">
             <a:pPr algn="l">
+              <a:buNone/>
               <a:defRPr sz="975" b="1">
                 <a:solidFill>
                   <a:srgbClr val="666761"/>
@@ -3639,6 +3671,7 @@
           <a:lstStyle xmlns:a="http://schemas.openxmlformats.org/drawingml/2006/main"/>
           <a:p xmlns:a="http://schemas.openxmlformats.org/drawingml/2006/main">
             <a:pPr algn="l">
+              <a:buNone/>
               <a:defRPr sz="1575" b="0">
                 <a:solidFill>
                   <a:srgbClr val="252725"/>
@@ -3722,6 +3755,7 @@
           <a:lstStyle xmlns:a="http://schemas.openxmlformats.org/drawingml/2006/main"/>
           <a:p xmlns:a="http://schemas.openxmlformats.org/drawingml/2006/main">
             <a:pPr algn="l">
+              <a:buNone/>
               <a:defRPr sz="975" b="1">
                 <a:solidFill>
                   <a:srgbClr val="666761"/>
@@ -3772,6 +3806,7 @@
           <a:lstStyle xmlns:a="http://schemas.openxmlformats.org/drawingml/2006/main"/>
           <a:p xmlns:a="http://schemas.openxmlformats.org/drawingml/2006/main">
             <a:pPr algn="l">
+              <a:buNone/>
               <a:defRPr sz="1575" b="0">
                 <a:solidFill>
                   <a:srgbClr val="252725"/>
@@ -3855,6 +3890,7 @@
           <a:lstStyle xmlns:a="http://schemas.openxmlformats.org/drawingml/2006/main"/>
           <a:p xmlns:a="http://schemas.openxmlformats.org/drawingml/2006/main">
             <a:pPr algn="l">
+              <a:buNone/>
               <a:defRPr sz="975" b="1">
                 <a:solidFill>
                   <a:srgbClr val="666761"/>
@@ -3905,6 +3941,7 @@
           <a:lstStyle xmlns:a="http://schemas.openxmlformats.org/drawingml/2006/main"/>
           <a:p xmlns:a="http://schemas.openxmlformats.org/drawingml/2006/main">
             <a:pPr algn="l">
+              <a:buNone/>
               <a:defRPr sz="1575" b="0">
                 <a:solidFill>
                   <a:srgbClr val="252725"/>
@@ -3984,6 +4021,7 @@
           <a:lstStyle xmlns:a="http://schemas.openxmlformats.org/drawingml/2006/main"/>
           <a:p xmlns:a="http://schemas.openxmlformats.org/drawingml/2006/main">
             <a:pPr algn="l">
+              <a:buNone/>
               <a:defRPr sz="900" b="1">
                 <a:solidFill>
                   <a:srgbClr val="173B33"/>
@@ -4034,6 +4072,7 @@
           <a:lstStyle xmlns:a="http://schemas.openxmlformats.org/drawingml/2006/main"/>
           <a:p xmlns:a="http://schemas.openxmlformats.org/drawingml/2006/main">
             <a:pPr algn="r">
+              <a:buNone/>
               <a:defRPr sz="900" b="1">
                 <a:solidFill>
                   <a:srgbClr val="666761"/>
@@ -4150,6 +4189,7 @@
           <a:lstStyle xmlns:a="http://schemas.openxmlformats.org/drawingml/2006/main"/>
           <a:p xmlns:a="http://schemas.openxmlformats.org/drawingml/2006/main">
             <a:pPr algn="l">
+              <a:buNone/>
               <a:defRPr sz="825" b="0">
                 <a:solidFill>
                   <a:srgbClr val="666761"/>
@@ -4200,6 +4240,7 @@
           <a:lstStyle xmlns:a="http://schemas.openxmlformats.org/drawingml/2006/main"/>
           <a:p xmlns:a="http://schemas.openxmlformats.org/drawingml/2006/main">
             <a:pPr algn="r">
+              <a:buNone/>
               <a:defRPr sz="825" b="0">
                 <a:solidFill>
                   <a:srgbClr val="666761"/>
@@ -4250,6 +4291,7 @@
           <a:lstStyle xmlns:a="http://schemas.openxmlformats.org/drawingml/2006/main"/>
           <a:p xmlns:a="http://schemas.openxmlformats.org/drawingml/2006/main">
             <a:pPr algn="l">
+              <a:buNone/>
               <a:defRPr sz="2850" b="1">
                 <a:solidFill>
                   <a:srgbClr val="173B33"/>
@@ -4300,6 +4342,7 @@
           <a:lstStyle xmlns:a="http://schemas.openxmlformats.org/drawingml/2006/main"/>
           <a:p xmlns:a="http://schemas.openxmlformats.org/drawingml/2006/main">
             <a:pPr algn="r">
+              <a:buNone/>
               <a:defRPr sz="900" b="1">
                 <a:solidFill>
                   <a:srgbClr val="666761"/>
@@ -4350,6 +4393,7 @@
           <a:lstStyle xmlns:a="http://schemas.openxmlformats.org/drawingml/2006/main"/>
           <a:p xmlns:a="http://schemas.openxmlformats.org/drawingml/2006/main">
             <a:pPr algn="r">
+              <a:buNone/>
               <a:defRPr sz="3150" b="1">
                 <a:solidFill>
                   <a:srgbClr val="173B33"/>
@@ -4433,6 +4477,7 @@
           <a:lstStyle xmlns:a="http://schemas.openxmlformats.org/drawingml/2006/main"/>
           <a:p xmlns:a="http://schemas.openxmlformats.org/drawingml/2006/main">
             <a:pPr algn="l">
+              <a:buNone/>
               <a:defRPr sz="975" b="1">
                 <a:solidFill>
                   <a:srgbClr val="666761"/>
@@ -4483,6 +4528,7 @@
           <a:lstStyle xmlns:a="http://schemas.openxmlformats.org/drawingml/2006/main"/>
           <a:p xmlns:a="http://schemas.openxmlformats.org/drawingml/2006/main">
             <a:pPr algn="l">
+              <a:buNone/>
               <a:defRPr sz="1575" b="0">
                 <a:solidFill>
                   <a:srgbClr val="252725"/>
@@ -4566,6 +4612,7 @@
           <a:lstStyle xmlns:a="http://schemas.openxmlformats.org/drawingml/2006/main"/>
           <a:p xmlns:a="http://schemas.openxmlformats.org/drawingml/2006/main">
             <a:pPr algn="l">
+              <a:buNone/>
               <a:defRPr sz="975" b="1">
                 <a:solidFill>
                   <a:srgbClr val="666761"/>
@@ -4616,6 +4663,7 @@
           <a:lstStyle xmlns:a="http://schemas.openxmlformats.org/drawingml/2006/main"/>
           <a:p xmlns:a="http://schemas.openxmlformats.org/drawingml/2006/main">
             <a:pPr algn="l">
+              <a:buNone/>
               <a:defRPr sz="1575" b="0">
                 <a:solidFill>
                   <a:srgbClr val="252725"/>
@@ -4699,6 +4747,7 @@
           <a:lstStyle xmlns:a="http://schemas.openxmlformats.org/drawingml/2006/main"/>
           <a:p xmlns:a="http://schemas.openxmlformats.org/drawingml/2006/main">
             <a:pPr algn="l">
+              <a:buNone/>
               <a:defRPr sz="975" b="1">
                 <a:solidFill>
                   <a:srgbClr val="666761"/>
@@ -4749,6 +4798,7 @@
           <a:lstStyle xmlns:a="http://schemas.openxmlformats.org/drawingml/2006/main"/>
           <a:p xmlns:a="http://schemas.openxmlformats.org/drawingml/2006/main">
             <a:pPr algn="l">
+              <a:buNone/>
               <a:defRPr sz="1575" b="0">
                 <a:solidFill>
                   <a:srgbClr val="252725"/>
@@ -4832,6 +4882,7 @@
           <a:lstStyle xmlns:a="http://schemas.openxmlformats.org/drawingml/2006/main"/>
           <a:p xmlns:a="http://schemas.openxmlformats.org/drawingml/2006/main">
             <a:pPr algn="l">
+              <a:buNone/>
               <a:defRPr sz="975" b="1">
                 <a:solidFill>
                   <a:srgbClr val="666761"/>
@@ -4882,6 +4933,7 @@
           <a:lstStyle xmlns:a="http://schemas.openxmlformats.org/drawingml/2006/main"/>
           <a:p xmlns:a="http://schemas.openxmlformats.org/drawingml/2006/main">
             <a:pPr algn="l">
+              <a:buNone/>
               <a:defRPr sz="1575" b="0">
                 <a:solidFill>
                   <a:srgbClr val="252725"/>
@@ -4932,6 +4984,7 @@
           <a:lstStyle xmlns:a="http://schemas.openxmlformats.org/drawingml/2006/main"/>
           <a:p xmlns:a="http://schemas.openxmlformats.org/drawingml/2006/main">
             <a:pPr algn="l">
+              <a:buNone/>
               <a:defRPr sz="1350" b="0">
                 <a:solidFill>
                   <a:srgbClr val="666761"/>
@@ -4944,7 +4997,7 @@
                   <a:srgbClr val="666761"/>
                 </a:solidFill>
               </a:rPr>
-              <a:t>Probable cost is included in EAC; pending revenue is excluded.</a:t>
+              <a:t>Commercial file remains under owner/CM review; reconcile the dated estimate to the current PM forecast.</a:t>
             </a:r>
           </a:p>
         </p:txBody>
@@ -5011,6 +5064,7 @@
           <a:lstStyle xmlns:a="http://schemas.openxmlformats.org/drawingml/2006/main"/>
           <a:p xmlns:a="http://schemas.openxmlformats.org/drawingml/2006/main">
             <a:pPr algn="l">
+              <a:buNone/>
               <a:defRPr sz="900" b="1">
                 <a:solidFill>
                   <a:srgbClr val="173B33"/>
@@ -5061,6 +5115,7 @@
           <a:lstStyle xmlns:a="http://schemas.openxmlformats.org/drawingml/2006/main"/>
           <a:p xmlns:a="http://schemas.openxmlformats.org/drawingml/2006/main">
             <a:pPr algn="r">
+              <a:buNone/>
               <a:defRPr sz="900" b="1">
                 <a:solidFill>
                   <a:srgbClr val="666761"/>
@@ -5177,6 +5232,7 @@
           <a:lstStyle xmlns:a="http://schemas.openxmlformats.org/drawingml/2006/main"/>
           <a:p xmlns:a="http://schemas.openxmlformats.org/drawingml/2006/main">
             <a:pPr algn="l">
+              <a:buNone/>
               <a:defRPr sz="825" b="0">
                 <a:solidFill>
                   <a:srgbClr val="666761"/>
@@ -5227,6 +5283,7 @@
           <a:lstStyle xmlns:a="http://schemas.openxmlformats.org/drawingml/2006/main"/>
           <a:p xmlns:a="http://schemas.openxmlformats.org/drawingml/2006/main">
             <a:pPr algn="r">
+              <a:buNone/>
               <a:defRPr sz="825" b="0">
                 <a:solidFill>
                   <a:srgbClr val="666761"/>
@@ -5277,6 +5334,7 @@
           <a:lstStyle xmlns:a="http://schemas.openxmlformats.org/drawingml/2006/main"/>
           <a:p xmlns:a="http://schemas.openxmlformats.org/drawingml/2006/main">
             <a:pPr algn="l">
+              <a:buNone/>
               <a:defRPr sz="2850" b="1">
                 <a:solidFill>
                   <a:srgbClr val="173B33"/>
@@ -5327,6 +5385,7 @@
           <a:lstStyle xmlns:a="http://schemas.openxmlformats.org/drawingml/2006/main"/>
           <a:p xmlns:a="http://schemas.openxmlformats.org/drawingml/2006/main">
             <a:pPr algn="l">
+              <a:buNone/>
               <a:defRPr sz="975" b="1">
                 <a:solidFill>
                   <a:srgbClr val="666761"/>
@@ -5377,6 +5436,7 @@
           <a:lstStyle xmlns:a="http://schemas.openxmlformats.org/drawingml/2006/main"/>
           <a:p xmlns:a="http://schemas.openxmlformats.org/drawingml/2006/main">
             <a:pPr algn="l">
+              <a:buNone/>
               <a:defRPr sz="1575" b="0">
                 <a:solidFill>
                   <a:srgbClr val="252725"/>
@@ -5460,6 +5520,7 @@
           <a:lstStyle xmlns:a="http://schemas.openxmlformats.org/drawingml/2006/main"/>
           <a:p xmlns:a="http://schemas.openxmlformats.org/drawingml/2006/main">
             <a:pPr algn="l">
+              <a:buNone/>
               <a:defRPr sz="975" b="1">
                 <a:solidFill>
                   <a:srgbClr val="666761"/>
@@ -5510,6 +5571,7 @@
           <a:lstStyle xmlns:a="http://schemas.openxmlformats.org/drawingml/2006/main"/>
           <a:p xmlns:a="http://schemas.openxmlformats.org/drawingml/2006/main">
             <a:pPr algn="l">
+              <a:buNone/>
               <a:defRPr sz="1575" b="0">
                 <a:solidFill>
                   <a:srgbClr val="252725"/>
@@ -5593,6 +5655,7 @@
           <a:lstStyle xmlns:a="http://schemas.openxmlformats.org/drawingml/2006/main"/>
           <a:p xmlns:a="http://schemas.openxmlformats.org/drawingml/2006/main">
             <a:pPr algn="l">
+              <a:buNone/>
               <a:defRPr sz="975" b="1">
                 <a:solidFill>
                   <a:srgbClr val="666761"/>
@@ -5643,6 +5706,7 @@
           <a:lstStyle xmlns:a="http://schemas.openxmlformats.org/drawingml/2006/main"/>
           <a:p xmlns:a="http://schemas.openxmlformats.org/drawingml/2006/main">
             <a:pPr algn="l">
+              <a:buNone/>
               <a:defRPr sz="1575" b="0">
                 <a:solidFill>
                   <a:srgbClr val="252725"/>
@@ -5726,6 +5790,7 @@
           <a:lstStyle xmlns:a="http://schemas.openxmlformats.org/drawingml/2006/main"/>
           <a:p xmlns:a="http://schemas.openxmlformats.org/drawingml/2006/main">
             <a:pPr algn="l">
+              <a:buNone/>
               <a:defRPr sz="975" b="1">
                 <a:solidFill>
                   <a:srgbClr val="666761"/>
@@ -5776,6 +5841,7 @@
           <a:lstStyle xmlns:a="http://schemas.openxmlformats.org/drawingml/2006/main"/>
           <a:p xmlns:a="http://schemas.openxmlformats.org/drawingml/2006/main">
             <a:pPr algn="l">
+              <a:buNone/>
               <a:defRPr sz="1575" b="0">
                 <a:solidFill>
                   <a:srgbClr val="252725"/>
@@ -5826,6 +5892,7 @@
           <a:lstStyle xmlns:a="http://schemas.openxmlformats.org/drawingml/2006/main"/>
           <a:p xmlns:a="http://schemas.openxmlformats.org/drawingml/2006/main">
             <a:pPr algn="l">
+              <a:buNone/>
               <a:defRPr sz="900" b="1">
                 <a:solidFill>
                   <a:srgbClr val="666761"/>
@@ -5876,6 +5943,7 @@
           <a:lstStyle xmlns:a="http://schemas.openxmlformats.org/drawingml/2006/main"/>
           <a:p xmlns:a="http://schemas.openxmlformats.org/drawingml/2006/main">
             <a:pPr algn="l">
+              <a:buNone/>
               <a:defRPr sz="4800" b="1">
                 <a:solidFill>
                   <a:srgbClr val="173B33"/>
@@ -5959,6 +6027,7 @@
           <a:lstStyle xmlns:a="http://schemas.openxmlformats.org/drawingml/2006/main"/>
           <a:p xmlns:a="http://schemas.openxmlformats.org/drawingml/2006/main">
             <a:pPr algn="l">
+              <a:buNone/>
               <a:defRPr sz="1275" b="0">
                 <a:solidFill>
                   <a:srgbClr val="252725"/>
@@ -5971,7 +6040,7 @@
                   <a:srgbClr val="252725"/>
                 </a:solidFill>
               </a:rPr>
-              <a:t>Unaccepted recovery is not netted against forecast cost.</a:t>
+              <a:t>Concrete-trade response disputes causation; the current commercial working file controls.</a:t>
             </a:r>
           </a:p>
         </p:txBody>
@@ -6038,6 +6107,7 @@
           <a:lstStyle xmlns:a="http://schemas.openxmlformats.org/drawingml/2006/main"/>
           <a:p xmlns:a="http://schemas.openxmlformats.org/drawingml/2006/main">
             <a:pPr algn="l">
+              <a:buNone/>
               <a:defRPr sz="900" b="1">
                 <a:solidFill>
                   <a:srgbClr val="173B33"/>
@@ -6088,6 +6158,7 @@
           <a:lstStyle xmlns:a="http://schemas.openxmlformats.org/drawingml/2006/main"/>
           <a:p xmlns:a="http://schemas.openxmlformats.org/drawingml/2006/main">
             <a:pPr algn="r">
+              <a:buNone/>
               <a:defRPr sz="900" b="1">
                 <a:solidFill>
                   <a:srgbClr val="666761"/>
@@ -6204,6 +6275,7 @@
           <a:lstStyle xmlns:a="http://schemas.openxmlformats.org/drawingml/2006/main"/>
           <a:p xmlns:a="http://schemas.openxmlformats.org/drawingml/2006/main">
             <a:pPr algn="l">
+              <a:buNone/>
               <a:defRPr sz="825" b="0">
                 <a:solidFill>
                   <a:srgbClr val="666761"/>
@@ -6254,6 +6326,7 @@
           <a:lstStyle xmlns:a="http://schemas.openxmlformats.org/drawingml/2006/main"/>
           <a:p xmlns:a="http://schemas.openxmlformats.org/drawingml/2006/main">
             <a:pPr algn="r">
+              <a:buNone/>
               <a:defRPr sz="825" b="0">
                 <a:solidFill>
                   <a:srgbClr val="666761"/>
@@ -6304,6 +6377,7 @@
           <a:lstStyle xmlns:a="http://schemas.openxmlformats.org/drawingml/2006/main"/>
           <a:p xmlns:a="http://schemas.openxmlformats.org/drawingml/2006/main">
             <a:pPr algn="l">
+              <a:buNone/>
               <a:defRPr sz="2850" b="1">
                 <a:solidFill>
                   <a:srgbClr val="173B33"/>
@@ -6354,6 +6428,7 @@
           <a:lstStyle xmlns:a="http://schemas.openxmlformats.org/drawingml/2006/main"/>
           <a:p xmlns:a="http://schemas.openxmlformats.org/drawingml/2006/main">
             <a:pPr algn="l">
+              <a:buNone/>
               <a:defRPr sz="900" b="1">
                 <a:solidFill>
                   <a:srgbClr val="666761"/>
@@ -6404,6 +6479,7 @@
           <a:lstStyle xmlns:a="http://schemas.openxmlformats.org/drawingml/2006/main"/>
           <a:p xmlns:a="http://schemas.openxmlformats.org/drawingml/2006/main">
             <a:pPr algn="l">
+              <a:buNone/>
               <a:defRPr sz="4350" b="1">
                 <a:solidFill>
                   <a:srgbClr val="173B33"/>
@@ -6487,6 +6563,7 @@
           <a:lstStyle xmlns:a="http://schemas.openxmlformats.org/drawingml/2006/main"/>
           <a:p xmlns:a="http://schemas.openxmlformats.org/drawingml/2006/main">
             <a:pPr algn="l">
+              <a:buNone/>
               <a:defRPr sz="1275" b="0">
                 <a:solidFill>
                   <a:srgbClr val="252725"/>
@@ -6537,6 +6614,7 @@
           <a:lstStyle xmlns:a="http://schemas.openxmlformats.org/drawingml/2006/main"/>
           <a:p xmlns:a="http://schemas.openxmlformats.org/drawingml/2006/main">
             <a:pPr algn="l">
+              <a:buNone/>
               <a:defRPr sz="975" b="1">
                 <a:solidFill>
                   <a:srgbClr val="666761"/>
@@ -6587,6 +6665,7 @@
           <a:lstStyle xmlns:a="http://schemas.openxmlformats.org/drawingml/2006/main"/>
           <a:p xmlns:a="http://schemas.openxmlformats.org/drawingml/2006/main">
             <a:pPr algn="l">
+              <a:buNone/>
               <a:defRPr sz="1575" b="0">
                 <a:solidFill>
                   <a:srgbClr val="252725"/>
@@ -6670,6 +6749,7 @@
           <a:lstStyle xmlns:a="http://schemas.openxmlformats.org/drawingml/2006/main"/>
           <a:p xmlns:a="http://schemas.openxmlformats.org/drawingml/2006/main">
             <a:pPr algn="l">
+              <a:buNone/>
               <a:defRPr sz="975" b="1">
                 <a:solidFill>
                   <a:srgbClr val="666761"/>
@@ -6720,6 +6800,7 @@
           <a:lstStyle xmlns:a="http://schemas.openxmlformats.org/drawingml/2006/main"/>
           <a:p xmlns:a="http://schemas.openxmlformats.org/drawingml/2006/main">
             <a:pPr algn="l">
+              <a:buNone/>
               <a:defRPr sz="1575" b="0">
                 <a:solidFill>
                   <a:srgbClr val="252725"/>
@@ -6803,6 +6884,7 @@
           <a:lstStyle xmlns:a="http://schemas.openxmlformats.org/drawingml/2006/main"/>
           <a:p xmlns:a="http://schemas.openxmlformats.org/drawingml/2006/main">
             <a:pPr algn="l">
+              <a:buNone/>
               <a:defRPr sz="975" b="1">
                 <a:solidFill>
                   <a:srgbClr val="666761"/>
@@ -6853,6 +6935,7 @@
           <a:lstStyle xmlns:a="http://schemas.openxmlformats.org/drawingml/2006/main"/>
           <a:p xmlns:a="http://schemas.openxmlformats.org/drawingml/2006/main">
             <a:pPr algn="l">
+              <a:buNone/>
               <a:defRPr sz="1575" b="0">
                 <a:solidFill>
                   <a:srgbClr val="252725"/>
@@ -6936,6 +7019,7 @@
           <a:lstStyle xmlns:a="http://schemas.openxmlformats.org/drawingml/2006/main"/>
           <a:p xmlns:a="http://schemas.openxmlformats.org/drawingml/2006/main">
             <a:pPr algn="l">
+              <a:buNone/>
               <a:defRPr sz="975" b="1">
                 <a:solidFill>
                   <a:srgbClr val="666761"/>
@@ -6986,6 +7070,7 @@
           <a:lstStyle xmlns:a="http://schemas.openxmlformats.org/drawingml/2006/main"/>
           <a:p xmlns:a="http://schemas.openxmlformats.org/drawingml/2006/main">
             <a:pPr algn="l">
+              <a:buNone/>
               <a:defRPr sz="1575" b="0">
                 <a:solidFill>
                   <a:srgbClr val="252725"/>
@@ -7065,6 +7150,7 @@
           <a:lstStyle xmlns:a="http://schemas.openxmlformats.org/drawingml/2006/main"/>
           <a:p xmlns:a="http://schemas.openxmlformats.org/drawingml/2006/main">
             <a:pPr algn="l">
+              <a:buNone/>
               <a:defRPr sz="900" b="1">
                 <a:solidFill>
                   <a:srgbClr val="173B33"/>
@@ -7115,6 +7201,7 @@
           <a:lstStyle xmlns:a="http://schemas.openxmlformats.org/drawingml/2006/main"/>
           <a:p xmlns:a="http://schemas.openxmlformats.org/drawingml/2006/main">
             <a:pPr algn="r">
+              <a:buNone/>
               <a:defRPr sz="900" b="1">
                 <a:solidFill>
                   <a:srgbClr val="666761"/>
@@ -7231,6 +7318,7 @@
           <a:lstStyle xmlns:a="http://schemas.openxmlformats.org/drawingml/2006/main"/>
           <a:p xmlns:a="http://schemas.openxmlformats.org/drawingml/2006/main">
             <a:pPr algn="l">
+              <a:buNone/>
               <a:defRPr sz="825" b="0">
                 <a:solidFill>
                   <a:srgbClr val="666761"/>
@@ -7281,6 +7369,7 @@
           <a:lstStyle xmlns:a="http://schemas.openxmlformats.org/drawingml/2006/main"/>
           <a:p xmlns:a="http://schemas.openxmlformats.org/drawingml/2006/main">
             <a:pPr algn="r">
+              <a:buNone/>
               <a:defRPr sz="825" b="0">
                 <a:solidFill>
                   <a:srgbClr val="666761"/>
@@ -7331,6 +7420,7 @@
           <a:lstStyle xmlns:a="http://schemas.openxmlformats.org/drawingml/2006/main"/>
           <a:p xmlns:a="http://schemas.openxmlformats.org/drawingml/2006/main">
             <a:pPr algn="l">
+              <a:buNone/>
               <a:defRPr sz="2850" b="1">
                 <a:solidFill>
                   <a:srgbClr val="173B33"/>
@@ -7381,6 +7471,7 @@
           <a:lstStyle xmlns:a="http://schemas.openxmlformats.org/drawingml/2006/main"/>
           <a:p xmlns:a="http://schemas.openxmlformats.org/drawingml/2006/main">
             <a:pPr algn="r">
+              <a:buNone/>
               <a:defRPr sz="900" b="1">
                 <a:solidFill>
                   <a:srgbClr val="666761"/>
@@ -7431,6 +7522,7 @@
           <a:lstStyle xmlns:a="http://schemas.openxmlformats.org/drawingml/2006/main"/>
           <a:p xmlns:a="http://schemas.openxmlformats.org/drawingml/2006/main">
             <a:pPr algn="r">
+              <a:buNone/>
               <a:defRPr sz="3150" b="1">
                 <a:solidFill>
                   <a:srgbClr val="173B33"/>
@@ -7514,6 +7606,7 @@
           <a:lstStyle xmlns:a="http://schemas.openxmlformats.org/drawingml/2006/main"/>
           <a:p xmlns:a="http://schemas.openxmlformats.org/drawingml/2006/main">
             <a:pPr algn="l">
+              <a:buNone/>
               <a:defRPr sz="975" b="1">
                 <a:solidFill>
                   <a:srgbClr val="666761"/>
@@ -7564,6 +7657,7 @@
           <a:lstStyle xmlns:a="http://schemas.openxmlformats.org/drawingml/2006/main"/>
           <a:p xmlns:a="http://schemas.openxmlformats.org/drawingml/2006/main">
             <a:pPr algn="l">
+              <a:buNone/>
               <a:defRPr sz="1575" b="0">
                 <a:solidFill>
                   <a:srgbClr val="252725"/>
@@ -7647,6 +7741,7 @@
           <a:lstStyle xmlns:a="http://schemas.openxmlformats.org/drawingml/2006/main"/>
           <a:p xmlns:a="http://schemas.openxmlformats.org/drawingml/2006/main">
             <a:pPr algn="l">
+              <a:buNone/>
               <a:defRPr sz="975" b="1">
                 <a:solidFill>
                   <a:srgbClr val="666761"/>
@@ -7697,6 +7792,7 @@
           <a:lstStyle xmlns:a="http://schemas.openxmlformats.org/drawingml/2006/main"/>
           <a:p xmlns:a="http://schemas.openxmlformats.org/drawingml/2006/main">
             <a:pPr algn="l">
+              <a:buNone/>
               <a:defRPr sz="1575" b="0">
                 <a:solidFill>
                   <a:srgbClr val="252725"/>
@@ -7780,6 +7876,7 @@
           <a:lstStyle xmlns:a="http://schemas.openxmlformats.org/drawingml/2006/main"/>
           <a:p xmlns:a="http://schemas.openxmlformats.org/drawingml/2006/main">
             <a:pPr algn="l">
+              <a:buNone/>
               <a:defRPr sz="975" b="1">
                 <a:solidFill>
                   <a:srgbClr val="666761"/>
@@ -7830,6 +7927,7 @@
           <a:lstStyle xmlns:a="http://schemas.openxmlformats.org/drawingml/2006/main"/>
           <a:p xmlns:a="http://schemas.openxmlformats.org/drawingml/2006/main">
             <a:pPr algn="l">
+              <a:buNone/>
               <a:defRPr sz="1575" b="0">
                 <a:solidFill>
                   <a:srgbClr val="252725"/>
@@ -7913,6 +8011,7 @@
           <a:lstStyle xmlns:a="http://schemas.openxmlformats.org/drawingml/2006/main"/>
           <a:p xmlns:a="http://schemas.openxmlformats.org/drawingml/2006/main">
             <a:pPr algn="l">
+              <a:buNone/>
               <a:defRPr sz="975" b="1">
                 <a:solidFill>
                   <a:srgbClr val="666761"/>
@@ -7963,6 +8062,7 @@
           <a:lstStyle xmlns:a="http://schemas.openxmlformats.org/drawingml/2006/main"/>
           <a:p xmlns:a="http://schemas.openxmlformats.org/drawingml/2006/main">
             <a:pPr algn="l">
+              <a:buNone/>
               <a:defRPr sz="1575" b="0">
                 <a:solidFill>
                   <a:srgbClr val="252725"/>
@@ -8013,6 +8113,7 @@
           <a:lstStyle xmlns:a="http://schemas.openxmlformats.org/drawingml/2006/main"/>
           <a:p xmlns:a="http://schemas.openxmlformats.org/drawingml/2006/main">
             <a:pPr algn="l">
+              <a:buNone/>
               <a:defRPr sz="1350" b="0">
                 <a:solidFill>
                   <a:srgbClr val="666761"/>
